--- a/teaching-pack/03-M02-measurement/M02-student.pptx
+++ b/teaching-pack/03-M02-measurement/M02-student.pptx
@@ -115,6 +115,1192 @@
     </a:lvl9pPr>
   </p:defaultTextStyle>
 </p:presentation>
+</file>
+
+<file path=ppt/notesMasters/notesMaster1.xml><?xml version="1.0" encoding="utf-8"?>
+<p:notesMaster xmlns:a="http://schemas.openxmlformats.org/drawingml/2006/main" xmlns:p="http://schemas.openxmlformats.org/presentationml/2006/main" xmlns:r="http://schemas.openxmlformats.org/officeDocument/2006/relationships">
+  <p:cSld>
+    <p:bg>
+      <p:bgRef idx="1001">
+        <a:schemeClr val="bg1"/>
+      </p:bgRef>
+    </p:bg>
+    <p:spTree>
+      <p:nvGrpSpPr>
+        <p:cNvPr id="1" name=""/>
+        <p:cNvGrpSpPr/>
+        <p:nvPr/>
+      </p:nvGrpSpPr>
+      <p:grpSpPr>
+        <a:xfrm>
+          <a:off x="0" y="0"/>
+          <a:ext cx="0" cy="0"/>
+          <a:chOff x="0" y="0"/>
+          <a:chExt cx="0" cy="0"/>
+        </a:xfrm>
+      </p:grpSpPr>
+      <p:sp>
+        <p:nvSpPr>
+          <p:cNvPr id="2" name="Header Placeholder 1"/>
+          <p:cNvSpPr>
+            <a:spLocks noGrp="1"/>
+          </p:cNvSpPr>
+          <p:nvPr>
+            <p:ph type="hdr" sz="quarter"/>
+          </p:nvPr>
+        </p:nvSpPr>
+        <p:spPr>
+          <a:xfrm>
+            <a:off x="0" y="0"/>
+            <a:ext cx="2971800" cy="457200"/>
+          </a:xfrm>
+          <a:prstGeom prst="rect">
+            <a:avLst/>
+          </a:prstGeom>
+        </p:spPr>
+        <p:txBody>
+          <a:bodyPr vert="horz" lIns="91440" tIns="45720" rIns="91440" bIns="45720" rtlCol="0"/>
+          <a:lstStyle>
+            <a:lvl1pPr algn="l">
+              <a:defRPr sz="1200"/>
+            </a:lvl1pPr>
+          </a:lstStyle>
+          <a:p>
+            <a:endParaRPr lang="en-US"/>
+          </a:p>
+        </p:txBody>
+      </p:sp>
+      <p:sp>
+        <p:nvSpPr>
+          <p:cNvPr id="3" name="Date Placeholder 2"/>
+          <p:cNvSpPr>
+            <a:spLocks noGrp="1"/>
+          </p:cNvSpPr>
+          <p:nvPr>
+            <p:ph type="dt" idx="1"/>
+          </p:nvPr>
+        </p:nvSpPr>
+        <p:spPr>
+          <a:xfrm>
+            <a:off x="3884613" y="0"/>
+            <a:ext cx="2971800" cy="457200"/>
+          </a:xfrm>
+          <a:prstGeom prst="rect">
+            <a:avLst/>
+          </a:prstGeom>
+        </p:spPr>
+        <p:txBody>
+          <a:bodyPr vert="horz" lIns="91440" tIns="45720" rIns="91440" bIns="45720" rtlCol="0"/>
+          <a:lstStyle>
+            <a:lvl1pPr algn="r">
+              <a:defRPr sz="1200"/>
+            </a:lvl1pPr>
+          </a:lstStyle>
+          <a:p>
+            <a:fld id="{0F89C1C7-3DCD-1040-A9CF-14679D8B5DDD}" type="datetimeFigureOut">
+              <a:rPr lang="en-US" smtClean="0"/>
+              <a:t>10/17/16</a:t>
+            </a:fld>
+            <a:endParaRPr lang="en-US"/>
+          </a:p>
+        </p:txBody>
+      </p:sp>
+      <p:sp>
+        <p:nvSpPr>
+          <p:cNvPr id="4" name="Slide Image Placeholder 3"/>
+          <p:cNvSpPr>
+            <a:spLocks noGrp="1" noRot="1" noChangeAspect="1"/>
+          </p:cNvSpPr>
+          <p:nvPr>
+            <p:ph type="sldImg" idx="2"/>
+          </p:nvPr>
+        </p:nvSpPr>
+        <p:spPr>
+          <a:xfrm>
+            <a:off x="1143000" y="685800"/>
+            <a:ext cx="4572000" cy="3429000"/>
+          </a:xfrm>
+          <a:prstGeom prst="rect">
+            <a:avLst/>
+          </a:prstGeom>
+          <a:noFill/>
+          <a:ln w="12700">
+            <a:solidFill>
+              <a:prstClr val="black"/>
+            </a:solidFill>
+          </a:ln>
+        </p:spPr>
+        <p:txBody>
+          <a:bodyPr vert="horz" lIns="91440" tIns="45720" rIns="91440" bIns="45720" rtlCol="0" anchor="ctr"/>
+          <a:lstStyle/>
+          <a:p>
+            <a:endParaRPr lang="en-US"/>
+          </a:p>
+        </p:txBody>
+      </p:sp>
+      <p:sp>
+        <p:nvSpPr>
+          <p:cNvPr id="5" name="Notes Placeholder 4"/>
+          <p:cNvSpPr>
+            <a:spLocks noGrp="1"/>
+          </p:cNvSpPr>
+          <p:nvPr>
+            <p:ph type="body" sz="quarter" idx="3"/>
+          </p:nvPr>
+        </p:nvSpPr>
+        <p:spPr>
+          <a:xfrm>
+            <a:off x="685800" y="4343400"/>
+            <a:ext cx="5486400" cy="4114800"/>
+          </a:xfrm>
+          <a:prstGeom prst="rect">
+            <a:avLst/>
+          </a:prstGeom>
+        </p:spPr>
+        <p:txBody>
+          <a:bodyPr vert="horz" lIns="91440" tIns="45720" rIns="91440" bIns="45720" rtlCol="0"/>
+          <a:lstStyle/>
+          <a:p>
+            <a:pPr lvl="0"/>
+            <a:r>
+              <a:rPr lang="en-US" smtClean="0"/>
+              <a:t>Click to edit Master text styles</a:t>
+            </a:r>
+          </a:p>
+          <a:p>
+            <a:pPr lvl="1"/>
+            <a:r>
+              <a:rPr lang="en-US" smtClean="0"/>
+              <a:t>Second level</a:t>
+            </a:r>
+          </a:p>
+          <a:p>
+            <a:pPr lvl="2"/>
+            <a:r>
+              <a:rPr lang="en-US" smtClean="0"/>
+              <a:t>Third level</a:t>
+            </a:r>
+          </a:p>
+          <a:p>
+            <a:pPr lvl="3"/>
+            <a:r>
+              <a:rPr lang="en-US" smtClean="0"/>
+              <a:t>Fourth level</a:t>
+            </a:r>
+          </a:p>
+          <a:p>
+            <a:pPr lvl="4"/>
+            <a:r>
+              <a:rPr lang="en-US" smtClean="0"/>
+              <a:t>Fifth level</a:t>
+            </a:r>
+            <a:endParaRPr lang="en-US"/>
+          </a:p>
+        </p:txBody>
+      </p:sp>
+      <p:sp>
+        <p:nvSpPr>
+          <p:cNvPr id="6" name="Footer Placeholder 5"/>
+          <p:cNvSpPr>
+            <a:spLocks noGrp="1"/>
+          </p:cNvSpPr>
+          <p:nvPr>
+            <p:ph type="ftr" sz="quarter" idx="4"/>
+          </p:nvPr>
+        </p:nvSpPr>
+        <p:spPr>
+          <a:xfrm>
+            <a:off x="0" y="8685213"/>
+            <a:ext cx="2971800" cy="457200"/>
+          </a:xfrm>
+          <a:prstGeom prst="rect">
+            <a:avLst/>
+          </a:prstGeom>
+        </p:spPr>
+        <p:txBody>
+          <a:bodyPr vert="horz" lIns="91440" tIns="45720" rIns="91440" bIns="45720" rtlCol="0" anchor="b"/>
+          <a:lstStyle>
+            <a:lvl1pPr algn="l">
+              <a:defRPr sz="1200"/>
+            </a:lvl1pPr>
+          </a:lstStyle>
+          <a:p>
+            <a:endParaRPr lang="en-US"/>
+          </a:p>
+        </p:txBody>
+      </p:sp>
+      <p:sp>
+        <p:nvSpPr>
+          <p:cNvPr id="7" name="Slide Number Placeholder 6"/>
+          <p:cNvSpPr>
+            <a:spLocks noGrp="1"/>
+          </p:cNvSpPr>
+          <p:nvPr>
+            <p:ph type="sldNum" sz="quarter" idx="5"/>
+          </p:nvPr>
+        </p:nvSpPr>
+        <p:spPr>
+          <a:xfrm>
+            <a:off x="3884613" y="8685213"/>
+            <a:ext cx="2971800" cy="457200"/>
+          </a:xfrm>
+          <a:prstGeom prst="rect">
+            <a:avLst/>
+          </a:prstGeom>
+        </p:spPr>
+        <p:txBody>
+          <a:bodyPr vert="horz" lIns="91440" tIns="45720" rIns="91440" bIns="45720" rtlCol="0" anchor="b"/>
+          <a:lstStyle>
+            <a:lvl1pPr algn="r">
+              <a:defRPr sz="1200"/>
+            </a:lvl1pPr>
+          </a:lstStyle>
+          <a:p>
+            <a:fld id="{BB5E49A5-4136-284D-997B-48E1D791AD67}" type="slidenum">
+              <a:rPr lang="en-US" smtClean="0"/>
+              <a:t>‹#›</a:t>
+            </a:fld>
+            <a:endParaRPr lang="en-US"/>
+          </a:p>
+        </p:txBody>
+      </p:sp>
+    </p:spTree>
+    <p:extLst>
+      <p:ext uri="{BB962C8B-B14F-4D97-AF65-F5344CB8AC3E}">
+        <p14:creationId xmlns:p14="http://schemas.microsoft.com/office/powerpoint/2010/main" val="2623252185"/>
+      </p:ext>
+    </p:extLst>
+  </p:cSld>
+  <p:clrMap bg1="lt1" tx1="dk1" bg2="lt2" tx2="dk2" accent1="accent1" accent2="accent2" accent3="accent3" accent4="accent4" accent5="accent5" accent6="accent6" hlink="hlink" folHlink="folHlink"/>
+  <p:notesStyle>
+    <a:lvl1pPr marL="0" algn="l" defTabSz="457200" rtl="0" eaLnBrk="1" latinLnBrk="0" hangingPunct="1">
+      <a:defRPr sz="1200" kern="1200">
+        <a:solidFill>
+          <a:schemeClr val="tx1"/>
+        </a:solidFill>
+        <a:latin typeface="+mn-lt"/>
+        <a:ea typeface="+mn-ea"/>
+        <a:cs typeface="+mn-cs"/>
+      </a:defRPr>
+    </a:lvl1pPr>
+    <a:lvl2pPr marL="457200" algn="l" defTabSz="457200" rtl="0" eaLnBrk="1" latinLnBrk="0" hangingPunct="1">
+      <a:defRPr sz="1200" kern="1200">
+        <a:solidFill>
+          <a:schemeClr val="tx1"/>
+        </a:solidFill>
+        <a:latin typeface="+mn-lt"/>
+        <a:ea typeface="+mn-ea"/>
+        <a:cs typeface="+mn-cs"/>
+      </a:defRPr>
+    </a:lvl2pPr>
+    <a:lvl3pPr marL="914400" algn="l" defTabSz="457200" rtl="0" eaLnBrk="1" latinLnBrk="0" hangingPunct="1">
+      <a:defRPr sz="1200" kern="1200">
+        <a:solidFill>
+          <a:schemeClr val="tx1"/>
+        </a:solidFill>
+        <a:latin typeface="+mn-lt"/>
+        <a:ea typeface="+mn-ea"/>
+        <a:cs typeface="+mn-cs"/>
+      </a:defRPr>
+    </a:lvl3pPr>
+    <a:lvl4pPr marL="1371600" algn="l" defTabSz="457200" rtl="0" eaLnBrk="1" latinLnBrk="0" hangingPunct="1">
+      <a:defRPr sz="1200" kern="1200">
+        <a:solidFill>
+          <a:schemeClr val="tx1"/>
+        </a:solidFill>
+        <a:latin typeface="+mn-lt"/>
+        <a:ea typeface="+mn-ea"/>
+        <a:cs typeface="+mn-cs"/>
+      </a:defRPr>
+    </a:lvl4pPr>
+    <a:lvl5pPr marL="1828800" algn="l" defTabSz="457200" rtl="0" eaLnBrk="1" latinLnBrk="0" hangingPunct="1">
+      <a:defRPr sz="1200" kern="1200">
+        <a:solidFill>
+          <a:schemeClr val="tx1"/>
+        </a:solidFill>
+        <a:latin typeface="+mn-lt"/>
+        <a:ea typeface="+mn-ea"/>
+        <a:cs typeface="+mn-cs"/>
+      </a:defRPr>
+    </a:lvl5pPr>
+    <a:lvl6pPr marL="2286000" algn="l" defTabSz="457200" rtl="0" eaLnBrk="1" latinLnBrk="0" hangingPunct="1">
+      <a:defRPr sz="1200" kern="1200">
+        <a:solidFill>
+          <a:schemeClr val="tx1"/>
+        </a:solidFill>
+        <a:latin typeface="+mn-lt"/>
+        <a:ea typeface="+mn-ea"/>
+        <a:cs typeface="+mn-cs"/>
+      </a:defRPr>
+    </a:lvl6pPr>
+    <a:lvl7pPr marL="2743200" algn="l" defTabSz="457200" rtl="0" eaLnBrk="1" latinLnBrk="0" hangingPunct="1">
+      <a:defRPr sz="1200" kern="1200">
+        <a:solidFill>
+          <a:schemeClr val="tx1"/>
+        </a:solidFill>
+        <a:latin typeface="+mn-lt"/>
+        <a:ea typeface="+mn-ea"/>
+        <a:cs typeface="+mn-cs"/>
+      </a:defRPr>
+    </a:lvl7pPr>
+    <a:lvl8pPr marL="3200400" algn="l" defTabSz="457200" rtl="0" eaLnBrk="1" latinLnBrk="0" hangingPunct="1">
+      <a:defRPr sz="1200" kern="1200">
+        <a:solidFill>
+          <a:schemeClr val="tx1"/>
+        </a:solidFill>
+        <a:latin typeface="+mn-lt"/>
+        <a:ea typeface="+mn-ea"/>
+        <a:cs typeface="+mn-cs"/>
+      </a:defRPr>
+    </a:lvl8pPr>
+    <a:lvl9pPr marL="3657600" algn="l" defTabSz="457200" rtl="0" eaLnBrk="1" latinLnBrk="0" hangingPunct="1">
+      <a:defRPr sz="1200" kern="1200">
+        <a:solidFill>
+          <a:schemeClr val="tx1"/>
+        </a:solidFill>
+        <a:latin typeface="+mn-lt"/>
+        <a:ea typeface="+mn-ea"/>
+        <a:cs typeface="+mn-cs"/>
+      </a:defRPr>
+    </a:lvl9pPr>
+  </p:notesStyle>
+</p:notesMaster>
+</file>
+
+<file path=ppt/notesSlides/notesSlide1.xml><?xml version="1.0" encoding="utf-8"?>
+<p:notes xmlns:a="http://schemas.openxmlformats.org/drawingml/2006/main" xmlns:p="http://schemas.openxmlformats.org/presentationml/2006/main" xmlns:r="http://schemas.openxmlformats.org/officeDocument/2006/relationships">
+  <p:cSld>
+    <p:spTree>
+      <p:nvGrpSpPr>
+        <p:cNvPr id="1" name=""/>
+        <p:cNvGrpSpPr/>
+        <p:nvPr/>
+      </p:nvGrpSpPr>
+      <p:grpSpPr>
+        <a:xfrm>
+          <a:off x="0" y="0"/>
+          <a:ext cx="0" cy="0"/>
+          <a:chOff x="0" y="0"/>
+          <a:chExt cx="0" cy="0"/>
+        </a:xfrm>
+      </p:grpSpPr>
+      <p:sp>
+        <p:nvSpPr>
+          <p:cNvPr id="2" name="Slide Image Placeholder 1"/>
+          <p:cNvSpPr>
+            <a:spLocks noGrp="1"/>
+          </p:cNvSpPr>
+          <p:nvPr>
+            <p:ph type="sldImg" idx="2"/>
+          </p:nvPr>
+        </p:nvSpPr>
+        <p:spPr/>
+      </p:sp>
+      <p:sp>
+        <p:nvSpPr>
+          <p:cNvPr id="3" name="Notes Placeholder 2"/>
+          <p:cNvSpPr>
+            <a:spLocks noGrp="1"/>
+          </p:cNvSpPr>
+          <p:nvPr>
+            <p:ph type="body" idx="3" sz="quarter"/>
+          </p:nvPr>
+        </p:nvSpPr>
+        <p:spPr/>
+        <p:txBody>
+          <a:bodyPr/>
+          <a:lstStyle/>
+          <a:p>
+            <a:r>
+              <a:t>In ACMEJOB voice, emphasize that measuring the same thing multiple times is not about finding a single “correct” answer but understanding how uncertainty shapes outcomes. Ask the room: What if your first reading was the only one you had? What would you conclude? Highlight that we’re not revealing the full picture of how averages can mislead yet—this is a puzzle to solve together.</a:t>
+            </a:r>
+          </a:p>
+          <a:p/>
+          <a:p>
+            <a:r>
+              <a:t>[FACILITATION]: Use the phrase “uncertainty is the story” to anchor their thinking early.</a:t>
+            </a:r>
+          </a:p>
+        </p:txBody>
+      </p:sp>
+      <p:sp>
+        <p:nvSpPr>
+          <p:cNvPr id="4" name="Slide Number Placeholder 3"/>
+          <p:cNvSpPr>
+            <a:spLocks noGrp="1"/>
+          </p:cNvSpPr>
+          <p:nvPr>
+            <p:ph type="sldNum" idx="5" sz="quarter"/>
+          </p:nvPr>
+        </p:nvSpPr>
+        <p:spPr/>
+      </p:sp>
+    </p:spTree>
+  </p:cSld>
+  <p:clrMapOvr>
+    <a:masterClrMapping/>
+  </p:clrMapOvr>
+</p:notes>
+</file>
+
+<file path=ppt/notesSlides/notesSlide10.xml><?xml version="1.0" encoding="utf-8"?>
+<p:notes xmlns:a="http://schemas.openxmlformats.org/drawingml/2006/main" xmlns:p="http://schemas.openxmlformats.org/presentationml/2006/main" xmlns:r="http://schemas.openxmlformats.org/officeDocument/2006/relationships">
+  <p:cSld>
+    <p:spTree>
+      <p:nvGrpSpPr>
+        <p:cNvPr id="1" name=""/>
+        <p:cNvGrpSpPr/>
+        <p:nvPr/>
+      </p:nvGrpSpPr>
+      <p:grpSpPr>
+        <a:xfrm>
+          <a:off x="0" y="0"/>
+          <a:ext cx="0" cy="0"/>
+          <a:chOff x="0" y="0"/>
+          <a:chExt cx="0" cy="0"/>
+        </a:xfrm>
+      </p:grpSpPr>
+      <p:sp>
+        <p:nvSpPr>
+          <p:cNvPr id="2" name="Slide Image Placeholder 1"/>
+          <p:cNvSpPr>
+            <a:spLocks noGrp="1"/>
+          </p:cNvSpPr>
+          <p:nvPr>
+            <p:ph type="sldImg" idx="2"/>
+          </p:nvPr>
+        </p:nvSpPr>
+        <p:spPr/>
+      </p:sp>
+      <p:sp>
+        <p:nvSpPr>
+          <p:cNvPr id="3" name="Notes Placeholder 2"/>
+          <p:cNvSpPr>
+            <a:spLocks noGrp="1"/>
+          </p:cNvSpPr>
+          <p:nvPr>
+            <p:ph type="body" idx="3" sz="quarter"/>
+          </p:nvPr>
+        </p:nvSpPr>
+        <p:spPr/>
+        <p:txBody>
+          <a:bodyPr/>
+          <a:lstStyle/>
+          <a:p>
+            <a:r>
+              <a:t>In ACMEJOB voice, direct students to analyze the data but not jump to conclusions. Ask: Why are there eight gauges and twelve readings? Note that we’re not revealing yet how the install day’s conditions or the roadway closure relate to the data’s patterns.</a:t>
+            </a:r>
+          </a:p>
+          <a:p/>
+          <a:p>
+            <a:r>
+              <a:t>[FACILITATION]: Use the phrase “data is a map, not a destination” to guide their analysis.</a:t>
+            </a:r>
+          </a:p>
+        </p:txBody>
+      </p:sp>
+      <p:sp>
+        <p:nvSpPr>
+          <p:cNvPr id="4" name="Slide Number Placeholder 3"/>
+          <p:cNvSpPr>
+            <a:spLocks noGrp="1"/>
+          </p:cNvSpPr>
+          <p:nvPr>
+            <p:ph type="sldNum" idx="5" sz="quarter"/>
+          </p:nvPr>
+        </p:nvSpPr>
+        <p:spPr/>
+      </p:sp>
+    </p:spTree>
+  </p:cSld>
+  <p:clrMapOvr>
+    <a:masterClrMapping/>
+  </p:clrMapOvr>
+</p:notes>
+</file>
+
+<file path=ppt/notesSlides/notesSlide11.xml><?xml version="1.0" encoding="utf-8"?>
+<p:notes xmlns:a="http://schemas.openxmlformats.org/drawingml/2006/main" xmlns:p="http://schemas.openxmlformats.org/presentationml/2006/main" xmlns:r="http://schemas.openxmlformats.org/officeDocument/2006/relationships">
+  <p:cSld>
+    <p:spTree>
+      <p:nvGrpSpPr>
+        <p:cNvPr id="1" name=""/>
+        <p:cNvGrpSpPr/>
+        <p:nvPr/>
+      </p:nvGrpSpPr>
+      <p:grpSpPr>
+        <a:xfrm>
+          <a:off x="0" y="0"/>
+          <a:ext cx="0" cy="0"/>
+          <a:chOff x="0" y="0"/>
+          <a:chExt cx="0" cy="0"/>
+        </a:xfrm>
+      </p:grpSpPr>
+      <p:sp>
+        <p:nvSpPr>
+          <p:cNvPr id="2" name="Slide Image Placeholder 1"/>
+          <p:cNvSpPr>
+            <a:spLocks noGrp="1"/>
+          </p:cNvSpPr>
+          <p:nvPr>
+            <p:ph type="sldImg" idx="2"/>
+          </p:nvPr>
+        </p:nvSpPr>
+        <p:spPr/>
+      </p:sp>
+      <p:sp>
+        <p:nvSpPr>
+          <p:cNvPr id="3" name="Notes Placeholder 2"/>
+          <p:cNvSpPr>
+            <a:spLocks noGrp="1"/>
+          </p:cNvSpPr>
+          <p:nvPr>
+            <p:ph type="body" idx="3" sz="quarter"/>
+          </p:nvPr>
+        </p:nvSpPr>
+        <p:spPr/>
+        <p:txBody>
+          <a:bodyPr/>
+          <a:lstStyle/>
+          <a:p>
+            <a:r>
+              <a:t>In ACMEJOB voice, contrast the machine’s speed with the class’s deliberate process. Ask: What if the machine’s answer is wrong? Note that we’re not revealing yet how the hunt will uncover the truth or how the class’s method might outperform the machine’s.</a:t>
+            </a:r>
+          </a:p>
+          <a:p/>
+          <a:p>
+            <a:r>
+              <a:t>[FACILITATION]: Use the phrase “hunt for the hidden” to frame the activity as a discovery mission.</a:t>
+            </a:r>
+          </a:p>
+        </p:txBody>
+      </p:sp>
+      <p:sp>
+        <p:nvSpPr>
+          <p:cNvPr id="4" name="Slide Number Placeholder 3"/>
+          <p:cNvSpPr>
+            <a:spLocks noGrp="1"/>
+          </p:cNvSpPr>
+          <p:nvPr>
+            <p:ph type="sldNum" idx="5" sz="quarter"/>
+          </p:nvPr>
+        </p:nvSpPr>
+        <p:spPr/>
+      </p:sp>
+    </p:spTree>
+  </p:cSld>
+  <p:clrMapOvr>
+    <a:masterClrMapping/>
+  </p:clrMapOvr>
+</p:notes>
+</file>
+
+<file path=ppt/notesSlides/notesSlide2.xml><?xml version="1.0" encoding="utf-8"?>
+<p:notes xmlns:a="http://schemas.openxmlformats.org/drawingml/2006/main" xmlns:p="http://schemas.openxmlformats.org/presentationml/2006/main" xmlns:r="http://schemas.openxmlformats.org/officeDocument/2006/relationships">
+  <p:cSld>
+    <p:spTree>
+      <p:nvGrpSpPr>
+        <p:cNvPr id="1" name=""/>
+        <p:cNvGrpSpPr/>
+        <p:nvPr/>
+      </p:nvGrpSpPr>
+      <p:grpSpPr>
+        <a:xfrm>
+          <a:off x="0" y="0"/>
+          <a:ext cx="0" cy="0"/>
+          <a:chOff x="0" y="0"/>
+          <a:chExt cx="0" cy="0"/>
+        </a:xfrm>
+      </p:grpSpPr>
+      <p:sp>
+        <p:nvSpPr>
+          <p:cNvPr id="2" name="Slide Image Placeholder 1"/>
+          <p:cNvSpPr>
+            <a:spLocks noGrp="1"/>
+          </p:cNvSpPr>
+          <p:nvPr>
+            <p:ph type="sldImg" idx="2"/>
+          </p:nvPr>
+        </p:nvSpPr>
+        <p:spPr/>
+      </p:sp>
+      <p:sp>
+        <p:nvSpPr>
+          <p:cNvPr id="3" name="Notes Placeholder 2"/>
+          <p:cNvSpPr>
+            <a:spLocks noGrp="1"/>
+          </p:cNvSpPr>
+          <p:nvPr>
+            <p:ph type="body" idx="3" sz="quarter"/>
+          </p:nvPr>
+        </p:nvSpPr>
+        <p:spPr/>
+        <p:txBody>
+          <a:bodyPr/>
+          <a:lstStyle/>
+          <a:p>
+            <a:r>
+              <a:t>In ACMEJOB voice, frame the decision as a test of whether human judgment can override a machine’s arithmetic. Ask: If the number is within the margin, does that mean we’re safe? Note that we’re not revealing yet whether the ±25 µε range includes the true value or how Diane’s human oversight might change the outcome.</a:t>
+            </a:r>
+          </a:p>
+          <a:p/>
+          <a:p>
+            <a:r>
+              <a:t>[FACILITATION]: Use the phrase “machine says yes, human says wait” to create tension.</a:t>
+            </a:r>
+          </a:p>
+        </p:txBody>
+      </p:sp>
+      <p:sp>
+        <p:nvSpPr>
+          <p:cNvPr id="4" name="Slide Number Placeholder 3"/>
+          <p:cNvSpPr>
+            <a:spLocks noGrp="1"/>
+          </p:cNvSpPr>
+          <p:nvPr>
+            <p:ph type="sldNum" idx="5" sz="quarter"/>
+          </p:nvPr>
+        </p:nvSpPr>
+        <p:spPr/>
+      </p:sp>
+    </p:spTree>
+  </p:cSld>
+  <p:clrMapOvr>
+    <a:masterClrMapping/>
+  </p:clrMapOvr>
+</p:notes>
+</file>
+
+<file path=ppt/notesSlides/notesSlide3.xml><?xml version="1.0" encoding="utf-8"?>
+<p:notes xmlns:a="http://schemas.openxmlformats.org/drawingml/2006/main" xmlns:p="http://schemas.openxmlformats.org/presentationml/2006/main" xmlns:r="http://schemas.openxmlformats.org/officeDocument/2006/relationships">
+  <p:cSld>
+    <p:spTree>
+      <p:nvGrpSpPr>
+        <p:cNvPr id="1" name=""/>
+        <p:cNvGrpSpPr/>
+        <p:nvPr/>
+      </p:nvGrpSpPr>
+      <p:grpSpPr>
+        <a:xfrm>
+          <a:off x="0" y="0"/>
+          <a:ext cx="0" cy="0"/>
+          <a:chOff x="0" y="0"/>
+          <a:chExt cx="0" cy="0"/>
+        </a:xfrm>
+      </p:grpSpPr>
+      <p:sp>
+        <p:nvSpPr>
+          <p:cNvPr id="2" name="Slide Image Placeholder 1"/>
+          <p:cNvSpPr>
+            <a:spLocks noGrp="1"/>
+          </p:cNvSpPr>
+          <p:nvPr>
+            <p:ph type="sldImg" idx="2"/>
+          </p:nvPr>
+        </p:nvSpPr>
+        <p:spPr/>
+      </p:sp>
+      <p:sp>
+        <p:nvSpPr>
+          <p:cNvPr id="3" name="Notes Placeholder 2"/>
+          <p:cNvSpPr>
+            <a:spLocks noGrp="1"/>
+          </p:cNvSpPr>
+          <p:nvPr>
+            <p:ph type="body" idx="3" sz="quarter"/>
+          </p:nvPr>
+        </p:nvSpPr>
+        <p:spPr/>
+        <p:txBody>
+          <a:bodyPr/>
+          <a:lstStyle/>
+          <a:p>
+            <a:r>
+              <a:t>In ACMEJOB voice, stress that the goal is to let students experience firsthand how their own measurements vary. Ask: Why do your readings differ even when you’re measuring the same thing? Note that we’re not revealing yet how averaging might smooth this out or where the real problem lies.</a:t>
+            </a:r>
+          </a:p>
+          <a:p/>
+          <a:p>
+            <a:r>
+              <a:t>[FACILITATION]: Encourage students to write down their first three readings without discussing them.</a:t>
+            </a:r>
+          </a:p>
+        </p:txBody>
+      </p:sp>
+      <p:sp>
+        <p:nvSpPr>
+          <p:cNvPr id="4" name="Slide Number Placeholder 3"/>
+          <p:cNvSpPr>
+            <a:spLocks noGrp="1"/>
+          </p:cNvSpPr>
+          <p:nvPr>
+            <p:ph type="sldNum" idx="5" sz="quarter"/>
+          </p:nvPr>
+        </p:nvSpPr>
+        <p:spPr/>
+      </p:sp>
+    </p:spTree>
+  </p:cSld>
+  <p:clrMapOvr>
+    <a:masterClrMapping/>
+  </p:clrMapOvr>
+</p:notes>
+</file>
+
+<file path=ppt/notesSlides/notesSlide4.xml><?xml version="1.0" encoding="utf-8"?>
+<p:notes xmlns:a="http://schemas.openxmlformats.org/drawingml/2006/main" xmlns:p="http://schemas.openxmlformats.org/presentationml/2006/main" xmlns:r="http://schemas.openxmlformats.org/officeDocument/2006/relationships">
+  <p:cSld>
+    <p:spTree>
+      <p:nvGrpSpPr>
+        <p:cNvPr id="1" name=""/>
+        <p:cNvGrpSpPr/>
+        <p:nvPr/>
+      </p:nvGrpSpPr>
+      <p:grpSpPr>
+        <a:xfrm>
+          <a:off x="0" y="0"/>
+          <a:ext cx="0" cy="0"/>
+          <a:chOff x="0" y="0"/>
+          <a:chExt cx="0" cy="0"/>
+        </a:xfrm>
+      </p:grpSpPr>
+      <p:sp>
+        <p:nvSpPr>
+          <p:cNvPr id="2" name="Slide Image Placeholder 1"/>
+          <p:cNvSpPr>
+            <a:spLocks noGrp="1"/>
+          </p:cNvSpPr>
+          <p:nvPr>
+            <p:ph type="sldImg" idx="2"/>
+          </p:nvPr>
+        </p:nvSpPr>
+        <p:spPr/>
+      </p:sp>
+      <p:sp>
+        <p:nvSpPr>
+          <p:cNvPr id="3" name="Notes Placeholder 2"/>
+          <p:cNvSpPr>
+            <a:spLocks noGrp="1"/>
+          </p:cNvSpPr>
+          <p:nvPr>
+            <p:ph type="body" idx="3" sz="quarter"/>
+          </p:nvPr>
+        </p:nvSpPr>
+        <p:spPr/>
+        <p:txBody>
+          <a:bodyPr/>
+          <a:lstStyle/>
+          <a:p>
+            <a:r>
+              <a:t>In ACMEJOB voice, define a measurement as a range of possible values, not a single number. Ask: If you measured something once, how confident would you be in that result? Note that we’re not revealing yet how uncertainty scales with repeated measurements or why multiple readings are necessary.</a:t>
+            </a:r>
+          </a:p>
+          <a:p/>
+          <a:p>
+            <a:r>
+              <a:t>[FACILITATION]: Use the phrase “a measurement is a story, not a number” to reframe their thinking.</a:t>
+            </a:r>
+          </a:p>
+        </p:txBody>
+      </p:sp>
+      <p:sp>
+        <p:nvSpPr>
+          <p:cNvPr id="4" name="Slide Number Placeholder 3"/>
+          <p:cNvSpPr>
+            <a:spLocks noGrp="1"/>
+          </p:cNvSpPr>
+          <p:nvPr>
+            <p:ph type="sldNum" idx="5" sz="quarter"/>
+          </p:nvPr>
+        </p:nvSpPr>
+        <p:spPr/>
+      </p:sp>
+    </p:spTree>
+  </p:cSld>
+  <p:clrMapOvr>
+    <a:masterClrMapping/>
+  </p:clrMapOvr>
+</p:notes>
+</file>
+
+<file path=ppt/notesSlides/notesSlide5.xml><?xml version="1.0" encoding="utf-8"?>
+<p:notes xmlns:a="http://schemas.openxmlformats.org/drawingml/2006/main" xmlns:p="http://schemas.openxmlformats.org/presentationml/2006/main" xmlns:r="http://schemas.openxmlformats.org/officeDocument/2006/relationships">
+  <p:cSld>
+    <p:spTree>
+      <p:nvGrpSpPr>
+        <p:cNvPr id="1" name=""/>
+        <p:cNvGrpSpPr/>
+        <p:nvPr/>
+      </p:nvGrpSpPr>
+      <p:grpSpPr>
+        <a:xfrm>
+          <a:off x="0" y="0"/>
+          <a:ext cx="0" cy="0"/>
+          <a:chOff x="0" y="0"/>
+          <a:chExt cx="0" cy="0"/>
+        </a:xfrm>
+      </p:grpSpPr>
+      <p:sp>
+        <p:nvSpPr>
+          <p:cNvPr id="2" name="Slide Image Placeholder 1"/>
+          <p:cNvSpPr>
+            <a:spLocks noGrp="1"/>
+          </p:cNvSpPr>
+          <p:nvPr>
+            <p:ph type="sldImg" idx="2"/>
+          </p:nvPr>
+        </p:nvSpPr>
+        <p:spPr/>
+      </p:sp>
+      <p:sp>
+        <p:nvSpPr>
+          <p:cNvPr id="3" name="Notes Placeholder 2"/>
+          <p:cNvSpPr>
+            <a:spLocks noGrp="1"/>
+          </p:cNvSpPr>
+          <p:nvPr>
+            <p:ph type="body" idx="3" sz="quarter"/>
+          </p:nvPr>
+        </p:nvSpPr>
+        <p:spPr/>
+        <p:txBody>
+          <a:bodyPr/>
+          <a:lstStyle/>
+          <a:p>
+            <a:r>
+              <a:t>In ACMEJOB voice, explain that each reading is a snapshot, and the spread shows how much the true value might vary. Ask: If your five readings all cluster tightly, does that mean the true value is known? Note that we’re not revealing yet how resolution limits precision or how the true value might still be outside the range.</a:t>
+            </a:r>
+          </a:p>
+          <a:p/>
+          <a:p>
+            <a:r>
+              <a:t>[FACILITATION]: Have students sketch their own spread on paper before discussing.</a:t>
+            </a:r>
+          </a:p>
+        </p:txBody>
+      </p:sp>
+      <p:sp>
+        <p:nvSpPr>
+          <p:cNvPr id="4" name="Slide Number Placeholder 3"/>
+          <p:cNvSpPr>
+            <a:spLocks noGrp="1"/>
+          </p:cNvSpPr>
+          <p:nvPr>
+            <p:ph type="sldNum" idx="5" sz="quarter"/>
+          </p:nvPr>
+        </p:nvSpPr>
+        <p:spPr/>
+      </p:sp>
+    </p:spTree>
+  </p:cSld>
+  <p:clrMapOvr>
+    <a:masterClrMapping/>
+  </p:clrMapOvr>
+</p:notes>
+</file>
+
+<file path=ppt/notesSlides/notesSlide6.xml><?xml version="1.0" encoding="utf-8"?>
+<p:notes xmlns:a="http://schemas.openxmlformats.org/drawingml/2006/main" xmlns:p="http://schemas.openxmlformats.org/presentationml/2006/main" xmlns:r="http://schemas.openxmlformats.org/officeDocument/2006/relationships">
+  <p:cSld>
+    <p:spTree>
+      <p:nvGrpSpPr>
+        <p:cNvPr id="1" name=""/>
+        <p:cNvGrpSpPr/>
+        <p:nvPr/>
+      </p:nvGrpSpPr>
+      <p:grpSpPr>
+        <a:xfrm>
+          <a:off x="0" y="0"/>
+          <a:ext cx="0" cy="0"/>
+          <a:chOff x="0" y="0"/>
+          <a:chExt cx="0" cy="0"/>
+        </a:xfrm>
+      </p:grpSpPr>
+      <p:sp>
+        <p:nvSpPr>
+          <p:cNvPr id="2" name="Slide Image Placeholder 1"/>
+          <p:cNvSpPr>
+            <a:spLocks noGrp="1"/>
+          </p:cNvSpPr>
+          <p:nvPr>
+            <p:ph type="sldImg" idx="2"/>
+          </p:nvPr>
+        </p:nvSpPr>
+        <p:spPr/>
+      </p:sp>
+      <p:sp>
+        <p:nvSpPr>
+          <p:cNvPr id="3" name="Notes Placeholder 2"/>
+          <p:cNvSpPr>
+            <a:spLocks noGrp="1"/>
+          </p:cNvSpPr>
+          <p:nvPr>
+            <p:ph type="body" idx="3" sz="quarter"/>
+          </p:nvPr>
+        </p:nvSpPr>
+        <p:spPr/>
+        <p:txBody>
+          <a:bodyPr/>
+          <a:lstStyle/>
+          <a:p>
+            <a:r>
+              <a:t>In ACMEJOB voice, contrast precision (tight clustering) with accuracy (closeness to the true value). Ask: Can your data be precise but not accurate? Note that we’re not revealing yet how systematic errors can hide in averages or how precision alone doesn’t guarantee correctness.</a:t>
+            </a:r>
+          </a:p>
+          <a:p/>
+          <a:p>
+            <a:r>
+              <a:t>[FACILITATION]: Use the phrase “precision is the mirror, accuracy is the target” to anchor the discussion.</a:t>
+            </a:r>
+          </a:p>
+        </p:txBody>
+      </p:sp>
+      <p:sp>
+        <p:nvSpPr>
+          <p:cNvPr id="4" name="Slide Number Placeholder 3"/>
+          <p:cNvSpPr>
+            <a:spLocks noGrp="1"/>
+          </p:cNvSpPr>
+          <p:nvPr>
+            <p:ph type="sldNum" idx="5" sz="quarter"/>
+          </p:nvPr>
+        </p:nvSpPr>
+        <p:spPr/>
+      </p:sp>
+    </p:spTree>
+  </p:cSld>
+  <p:clrMapOvr>
+    <a:masterClrMapping/>
+  </p:clrMapOvr>
+</p:notes>
+</file>
+
+<file path=ppt/notesSlides/notesSlide7.xml><?xml version="1.0" encoding="utf-8"?>
+<p:notes xmlns:a="http://schemas.openxmlformats.org/drawingml/2006/main" xmlns:p="http://schemas.openxmlformats.org/presentationml/2006/main" xmlns:r="http://schemas.openxmlformats.org/officeDocument/2006/relationships">
+  <p:cSld>
+    <p:spTree>
+      <p:nvGrpSpPr>
+        <p:cNvPr id="1" name=""/>
+        <p:cNvGrpSpPr/>
+        <p:nvPr/>
+      </p:nvGrpSpPr>
+      <p:grpSpPr>
+        <a:xfrm>
+          <a:off x="0" y="0"/>
+          <a:ext cx="0" cy="0"/>
+          <a:chOff x="0" y="0"/>
+          <a:chExt cx="0" cy="0"/>
+        </a:xfrm>
+      </p:grpSpPr>
+      <p:sp>
+        <p:nvSpPr>
+          <p:cNvPr id="2" name="Slide Image Placeholder 1"/>
+          <p:cNvSpPr>
+            <a:spLocks noGrp="1"/>
+          </p:cNvSpPr>
+          <p:nvPr>
+            <p:ph type="sldImg" idx="2"/>
+          </p:nvPr>
+        </p:nvSpPr>
+        <p:spPr/>
+      </p:sp>
+      <p:sp>
+        <p:nvSpPr>
+          <p:cNvPr id="3" name="Notes Placeholder 2"/>
+          <p:cNvSpPr>
+            <a:spLocks noGrp="1"/>
+          </p:cNvSpPr>
+          <p:nvPr>
+            <p:ph type="body" idx="3" sz="quarter"/>
+          </p:nvPr>
+        </p:nvSpPr>
+        <p:spPr/>
+        <p:txBody>
+          <a:bodyPr/>
+          <a:lstStyle/>
+          <a:p>
+            <a:r>
+              <a:t>In ACMEJOB voice, explain that random errors average out, but systematic errors stay hidden. Ask: If you average ten readings, could you miss a flaw in the tool itself? Note that we’re not revealing yet how the invoice cost ties to undetected systematic errors or how Diane’s human check might catch them.</a:t>
+            </a:r>
+          </a:p>
+          <a:p/>
+          <a:p>
+            <a:r>
+              <a:t>[FACILITATION]: Use the phrase “averaging is a double-edged sword” to highlight the risk.</a:t>
+            </a:r>
+          </a:p>
+        </p:txBody>
+      </p:sp>
+      <p:sp>
+        <p:nvSpPr>
+          <p:cNvPr id="4" name="Slide Number Placeholder 3"/>
+          <p:cNvSpPr>
+            <a:spLocks noGrp="1"/>
+          </p:cNvSpPr>
+          <p:nvPr>
+            <p:ph type="sldNum" idx="5" sz="quarter"/>
+          </p:nvPr>
+        </p:nvSpPr>
+        <p:spPr/>
+      </p:sp>
+    </p:spTree>
+  </p:cSld>
+  <p:clrMapOvr>
+    <a:masterClrMapping/>
+  </p:clrMapOvr>
+</p:notes>
+</file>
+
+<file path=ppt/notesSlides/notesSlide8.xml><?xml version="1.0" encoding="utf-8"?>
+<p:notes xmlns:a="http://schemas.openxmlformats.org/drawingml/2006/main" xmlns:p="http://schemas.openxmlformats.org/presentationml/2006/main" xmlns:r="http://schemas.openxmlformats.org/officeDocument/2006/relationships">
+  <p:cSld>
+    <p:spTree>
+      <p:nvGrpSpPr>
+        <p:cNvPr id="1" name=""/>
+        <p:cNvGrpSpPr/>
+        <p:nvPr/>
+      </p:nvGrpSpPr>
+      <p:grpSpPr>
+        <a:xfrm>
+          <a:off x="0" y="0"/>
+          <a:ext cx="0" cy="0"/>
+          <a:chOff x="0" y="0"/>
+          <a:chExt cx="0" cy="0"/>
+        </a:xfrm>
+      </p:grpSpPr>
+      <p:sp>
+        <p:nvSpPr>
+          <p:cNvPr id="2" name="Slide Image Placeholder 1"/>
+          <p:cNvSpPr>
+            <a:spLocks noGrp="1"/>
+          </p:cNvSpPr>
+          <p:nvPr>
+            <p:ph type="sldImg" idx="2"/>
+          </p:nvPr>
+        </p:nvSpPr>
+        <p:spPr/>
+      </p:sp>
+      <p:sp>
+        <p:nvSpPr>
+          <p:cNvPr id="3" name="Notes Placeholder 2"/>
+          <p:cNvSpPr>
+            <a:spLocks noGrp="1"/>
+          </p:cNvSpPr>
+          <p:nvPr>
+            <p:ph type="body" idx="3" sz="quarter"/>
+          </p:nvPr>
+        </p:nvSpPr>
+        <p:spPr/>
+        <p:txBody>
+          <a:bodyPr/>
+          <a:lstStyle/>
+          <a:p>
+            <a:r>
+              <a:t>In ACMEJOB voice, outline the lab steps: measure, pause, repeat, and calculate area with uncertainty. Ask: Why must you swap pins between readings? Note that we’re not revealing yet how the backup file connects to the gauges or how the lab’s design tests method accuracy.</a:t>
+            </a:r>
+          </a:p>
+          <a:p/>
+          <a:p>
+            <a:r>
+              <a:t>[FACILITATION]: Use the phrase “measure, pause, repeat” as a mantra for the lab.</a:t>
+            </a:r>
+          </a:p>
+        </p:txBody>
+      </p:sp>
+      <p:sp>
+        <p:nvSpPr>
+          <p:cNvPr id="4" name="Slide Number Placeholder 3"/>
+          <p:cNvSpPr>
+            <a:spLocks noGrp="1"/>
+          </p:cNvSpPr>
+          <p:nvPr>
+            <p:ph type="sldNum" idx="5" sz="quarter"/>
+          </p:nvPr>
+        </p:nvSpPr>
+        <p:spPr/>
+      </p:sp>
+    </p:spTree>
+  </p:cSld>
+  <p:clrMapOvr>
+    <a:masterClrMapping/>
+  </p:clrMapOvr>
+</p:notes>
+</file>
+
+<file path=ppt/notesSlides/notesSlide9.xml><?xml version="1.0" encoding="utf-8"?>
+<p:notes xmlns:a="http://schemas.openxmlformats.org/drawingml/2006/main" xmlns:p="http://schemas.openxmlformats.org/presentationml/2006/main" xmlns:r="http://schemas.openxmlformats.org/officeDocument/2006/relationships">
+  <p:cSld>
+    <p:spTree>
+      <p:nvGrpSpPr>
+        <p:cNvPr id="1" name=""/>
+        <p:cNvGrpSpPr/>
+        <p:nvPr/>
+      </p:nvGrpSpPr>
+      <p:grpSpPr>
+        <a:xfrm>
+          <a:off x="0" y="0"/>
+          <a:ext cx="0" cy="0"/>
+          <a:chOff x="0" y="0"/>
+          <a:chExt cx="0" cy="0"/>
+        </a:xfrm>
+      </p:grpSpPr>
+      <p:sp>
+        <p:nvSpPr>
+          <p:cNvPr id="2" name="Slide Image Placeholder 1"/>
+          <p:cNvSpPr>
+            <a:spLocks noGrp="1"/>
+          </p:cNvSpPr>
+          <p:nvPr>
+            <p:ph type="sldImg" idx="2"/>
+          </p:nvPr>
+        </p:nvSpPr>
+        <p:spPr/>
+      </p:sp>
+      <p:sp>
+        <p:nvSpPr>
+          <p:cNvPr id="3" name="Notes Placeholder 2"/>
+          <p:cNvSpPr>
+            <a:spLocks noGrp="1"/>
+          </p:cNvSpPr>
+          <p:nvPr>
+            <p:ph type="body" idx="3" sz="quarter"/>
+          </p:nvPr>
+        </p:nvSpPr>
+        <p:spPr/>
+        <p:txBody>
+          <a:bodyPr/>
+          <a:lstStyle/>
+          <a:p>
+            <a:r>
+              <a:t>In ACMEJOB voice, explain that a 1% error in diameter leads to a 2% error in area. Ask: Why does the error double? Note that we’re not revealing yet how this connects to the gauges or how the backup example’s method might differ from the lab’s.</a:t>
+            </a:r>
+          </a:p>
+          <a:p/>
+          <a:p>
+            <a:r>
+              <a:t>[FACILITATION]: Use the phrase “error propagates like a chain” to visualize the math.</a:t>
+            </a:r>
+          </a:p>
+        </p:txBody>
+      </p:sp>
+      <p:sp>
+        <p:nvSpPr>
+          <p:cNvPr id="4" name="Slide Number Placeholder 3"/>
+          <p:cNvSpPr>
+            <a:spLocks noGrp="1"/>
+          </p:cNvSpPr>
+          <p:nvPr>
+            <p:ph type="sldNum" idx="5" sz="quarter"/>
+          </p:nvPr>
+        </p:nvSpPr>
+        <p:spPr/>
+      </p:sp>
+    </p:spTree>
+  </p:cSld>
+  <p:clrMapOvr>
+    <a:masterClrMapping/>
+  </p:clrMapOvr>
+</p:notes>
 </file>
 
 <file path=ppt/slideLayouts/slideLayout1.xml><?xml version="1.0" encoding="utf-8"?>
@@ -7304,4 +8490,324 @@
   </a:objectDefaults>
   <a:extraClrSchemeLst/>
 </a:theme>
+</file>
+
+<file path=ppt/theme/theme2.xml><?xml version="1.0" encoding="utf-8"?>
+<a:theme xmlns:a="http://schemas.openxmlformats.org/drawingml/2006/main" name="Office Theme">
+  <a:themeElements>
+    <a:clrScheme name="Office">
+      <a:dk1>
+        <a:sysClr val="windowText" lastClr="000000"/>
+      </a:dk1>
+      <a:lt1>
+        <a:sysClr val="window" lastClr="FFFFFF"/>
+      </a:lt1>
+      <a:dk2>
+        <a:srgbClr val="1F497D"/>
+      </a:dk2>
+      <a:lt2>
+        <a:srgbClr val="EEECE1"/>
+      </a:lt2>
+      <a:accent1>
+        <a:srgbClr val="4F81BD"/>
+      </a:accent1>
+      <a:accent2>
+        <a:srgbClr val="C0504D"/>
+      </a:accent2>
+      <a:accent3>
+        <a:srgbClr val="9BBB59"/>
+      </a:accent3>
+      <a:accent4>
+        <a:srgbClr val="8064A2"/>
+      </a:accent4>
+      <a:accent5>
+        <a:srgbClr val="4BACC6"/>
+      </a:accent5>
+      <a:accent6>
+        <a:srgbClr val="F79646"/>
+      </a:accent6>
+      <a:hlink>
+        <a:srgbClr val="0000FF"/>
+      </a:hlink>
+      <a:folHlink>
+        <a:srgbClr val="800080"/>
+      </a:folHlink>
+    </a:clrScheme>
+    <a:fontScheme name="Office">
+      <a:majorFont>
+        <a:latin typeface="Calibri"/>
+        <a:ea typeface=""/>
+        <a:cs typeface=""/>
+        <a:font script="Jpan" typeface="ＭＳ Ｐゴシック"/>
+        <a:font script="Hang" typeface="맑은 고딕"/>
+        <a:font script="Hans" typeface="宋体"/>
+        <a:font script="Hant" typeface="新細明體"/>
+        <a:font script="Arab" typeface="Times New Roman"/>
+        <a:font script="Hebr" typeface="Times New Roman"/>
+        <a:font script="Thai" typeface="Angsana New"/>
+        <a:font script="Ethi" typeface="Nyala"/>
+        <a:font script="Beng" typeface="Vrinda"/>
+        <a:font script="Gujr" typeface="Shruti"/>
+        <a:font script="Khmr" typeface="MoolBoran"/>
+        <a:font script="Knda" typeface="Tunga"/>
+        <a:font script="Guru" typeface="Raavi"/>
+        <a:font script="Cans" typeface="Euphemia"/>
+        <a:font script="Cher" typeface="Plantagenet Cherokee"/>
+        <a:font script="Yiii" typeface="Microsoft Yi Baiti"/>
+        <a:font script="Tibt" typeface="Microsoft Himalaya"/>
+        <a:font script="Thaa" typeface="MV Boli"/>
+        <a:font script="Deva" typeface="Mangal"/>
+        <a:font script="Telu" typeface="Gautami"/>
+        <a:font script="Taml" typeface="Latha"/>
+        <a:font script="Syrc" typeface="Estrangelo Edessa"/>
+        <a:font script="Orya" typeface="Kalinga"/>
+        <a:font script="Mlym" typeface="Kartika"/>
+        <a:font script="Laoo" typeface="DokChampa"/>
+        <a:font script="Sinh" typeface="Iskoola Pota"/>
+        <a:font script="Mong" typeface="Mongolian Baiti"/>
+        <a:font script="Viet" typeface="Times New Roman"/>
+        <a:font script="Uigh" typeface="Microsoft Uighur"/>
+        <a:font script="Geor" typeface="Sylfaen"/>
+      </a:majorFont>
+      <a:minorFont>
+        <a:latin typeface="Calibri"/>
+        <a:ea typeface=""/>
+        <a:cs typeface=""/>
+        <a:font script="Jpan" typeface="ＭＳ Ｐゴシック"/>
+        <a:font script="Hang" typeface="맑은 고딕"/>
+        <a:font script="Hans" typeface="宋体"/>
+        <a:font script="Hant" typeface="新細明體"/>
+        <a:font script="Arab" typeface="Arial"/>
+        <a:font script="Hebr" typeface="Arial"/>
+        <a:font script="Thai" typeface="Cordia New"/>
+        <a:font script="Ethi" typeface="Nyala"/>
+        <a:font script="Beng" typeface="Vrinda"/>
+        <a:font script="Gujr" typeface="Shruti"/>
+        <a:font script="Khmr" typeface="DaunPenh"/>
+        <a:font script="Knda" typeface="Tunga"/>
+        <a:font script="Guru" typeface="Raavi"/>
+        <a:font script="Cans" typeface="Euphemia"/>
+        <a:font script="Cher" typeface="Plantagenet Cherokee"/>
+        <a:font script="Yiii" typeface="Microsoft Yi Baiti"/>
+        <a:font script="Tibt" typeface="Microsoft Himalaya"/>
+        <a:font script="Thaa" typeface="MV Boli"/>
+        <a:font script="Deva" typeface="Mangal"/>
+        <a:font script="Telu" typeface="Gautami"/>
+        <a:font script="Taml" typeface="Latha"/>
+        <a:font script="Syrc" typeface="Estrangelo Edessa"/>
+        <a:font script="Orya" typeface="Kalinga"/>
+        <a:font script="Mlym" typeface="Kartika"/>
+        <a:font script="Laoo" typeface="DokChampa"/>
+        <a:font script="Sinh" typeface="Iskoola Pota"/>
+        <a:font script="Mong" typeface="Mongolian Baiti"/>
+        <a:font script="Viet" typeface="Arial"/>
+        <a:font script="Uigh" typeface="Microsoft Uighur"/>
+        <a:font script="Geor" typeface="Sylfaen"/>
+      </a:minorFont>
+    </a:fontScheme>
+    <a:fmtScheme name="Office">
+      <a:fillStyleLst>
+        <a:solidFill>
+          <a:schemeClr val="phClr"/>
+        </a:solidFill>
+        <a:gradFill rotWithShape="1">
+          <a:gsLst>
+            <a:gs pos="0">
+              <a:schemeClr val="phClr">
+                <a:tint val="50000"/>
+                <a:satMod val="300000"/>
+              </a:schemeClr>
+            </a:gs>
+            <a:gs pos="35000">
+              <a:schemeClr val="phClr">
+                <a:tint val="37000"/>
+                <a:satMod val="300000"/>
+              </a:schemeClr>
+            </a:gs>
+            <a:gs pos="100000">
+              <a:schemeClr val="phClr">
+                <a:tint val="15000"/>
+                <a:satMod val="350000"/>
+              </a:schemeClr>
+            </a:gs>
+          </a:gsLst>
+          <a:lin ang="16200000" scaled="1"/>
+        </a:gradFill>
+        <a:gradFill rotWithShape="1">
+          <a:gsLst>
+            <a:gs pos="0">
+              <a:schemeClr val="phClr">
+                <a:tint val="100000"/>
+                <a:shade val="100000"/>
+                <a:satMod val="130000"/>
+              </a:schemeClr>
+            </a:gs>
+            <a:gs pos="100000">
+              <a:schemeClr val="phClr">
+                <a:tint val="50000"/>
+                <a:shade val="100000"/>
+                <a:satMod val="350000"/>
+              </a:schemeClr>
+            </a:gs>
+          </a:gsLst>
+          <a:lin ang="16200000" scaled="0"/>
+        </a:gradFill>
+      </a:fillStyleLst>
+      <a:lnStyleLst>
+        <a:ln w="9525" cap="flat" cmpd="sng" algn="ctr">
+          <a:solidFill>
+            <a:schemeClr val="phClr">
+              <a:shade val="95000"/>
+              <a:satMod val="105000"/>
+            </a:schemeClr>
+          </a:solidFill>
+          <a:prstDash val="solid"/>
+        </a:ln>
+        <a:ln w="25400" cap="flat" cmpd="sng" algn="ctr">
+          <a:solidFill>
+            <a:schemeClr val="phClr"/>
+          </a:solidFill>
+          <a:prstDash val="solid"/>
+        </a:ln>
+        <a:ln w="38100" cap="flat" cmpd="sng" algn="ctr">
+          <a:solidFill>
+            <a:schemeClr val="phClr"/>
+          </a:solidFill>
+          <a:prstDash val="solid"/>
+        </a:ln>
+      </a:lnStyleLst>
+      <a:effectStyleLst>
+        <a:effectStyle>
+          <a:effectLst>
+            <a:outerShdw blurRad="40000" dist="20000" dir="5400000" rotWithShape="0">
+              <a:srgbClr val="000000">
+                <a:alpha val="38000"/>
+              </a:srgbClr>
+            </a:outerShdw>
+          </a:effectLst>
+        </a:effectStyle>
+        <a:effectStyle>
+          <a:effectLst>
+            <a:outerShdw blurRad="40000" dist="23000" dir="5400000" rotWithShape="0">
+              <a:srgbClr val="000000">
+                <a:alpha val="35000"/>
+              </a:srgbClr>
+            </a:outerShdw>
+          </a:effectLst>
+        </a:effectStyle>
+        <a:effectStyle>
+          <a:effectLst>
+            <a:outerShdw blurRad="40000" dist="23000" dir="5400000" rotWithShape="0">
+              <a:srgbClr val="000000">
+                <a:alpha val="35000"/>
+              </a:srgbClr>
+            </a:outerShdw>
+          </a:effectLst>
+          <a:scene3d>
+            <a:camera prst="orthographicFront">
+              <a:rot lat="0" lon="0" rev="0"/>
+            </a:camera>
+            <a:lightRig rig="threePt" dir="t">
+              <a:rot lat="0" lon="0" rev="1200000"/>
+            </a:lightRig>
+          </a:scene3d>
+          <a:sp3d>
+            <a:bevelT w="63500" h="25400"/>
+          </a:sp3d>
+        </a:effectStyle>
+      </a:effectStyleLst>
+      <a:bgFillStyleLst>
+        <a:solidFill>
+          <a:schemeClr val="phClr"/>
+        </a:solidFill>
+        <a:gradFill rotWithShape="1">
+          <a:gsLst>
+            <a:gs pos="0">
+              <a:schemeClr val="phClr">
+                <a:tint val="40000"/>
+                <a:satMod val="350000"/>
+              </a:schemeClr>
+            </a:gs>
+            <a:gs pos="40000">
+              <a:schemeClr val="phClr">
+                <a:tint val="45000"/>
+                <a:shade val="99000"/>
+                <a:satMod val="350000"/>
+              </a:schemeClr>
+            </a:gs>
+            <a:gs pos="100000">
+              <a:schemeClr val="phClr">
+                <a:shade val="20000"/>
+                <a:satMod val="255000"/>
+              </a:schemeClr>
+            </a:gs>
+          </a:gsLst>
+          <a:path path="circle">
+            <a:fillToRect l="50000" t="-80000" r="50000" b="180000"/>
+          </a:path>
+        </a:gradFill>
+        <a:gradFill rotWithShape="1">
+          <a:gsLst>
+            <a:gs pos="0">
+              <a:schemeClr val="phClr">
+                <a:tint val="80000"/>
+                <a:satMod val="300000"/>
+              </a:schemeClr>
+            </a:gs>
+            <a:gs pos="100000">
+              <a:schemeClr val="phClr">
+                <a:shade val="30000"/>
+                <a:satMod val="200000"/>
+              </a:schemeClr>
+            </a:gs>
+          </a:gsLst>
+          <a:path path="circle">
+            <a:fillToRect l="50000" t="50000" r="50000" b="50000"/>
+          </a:path>
+        </a:gradFill>
+      </a:bgFillStyleLst>
+    </a:fmtScheme>
+  </a:themeElements>
+  <a:objectDefaults>
+    <a:spDef>
+      <a:spPr/>
+      <a:bodyPr/>
+      <a:lstStyle/>
+      <a:style>
+        <a:lnRef idx="1">
+          <a:schemeClr val="accent1"/>
+        </a:lnRef>
+        <a:fillRef idx="3">
+          <a:schemeClr val="accent1"/>
+        </a:fillRef>
+        <a:effectRef idx="2">
+          <a:schemeClr val="accent1"/>
+        </a:effectRef>
+        <a:fontRef idx="minor">
+          <a:schemeClr val="lt1"/>
+        </a:fontRef>
+      </a:style>
+    </a:spDef>
+    <a:lnDef>
+      <a:spPr/>
+      <a:bodyPr/>
+      <a:lstStyle/>
+      <a:style>
+        <a:lnRef idx="2">
+          <a:schemeClr val="accent1"/>
+        </a:lnRef>
+        <a:fillRef idx="0">
+          <a:schemeClr val="accent1"/>
+        </a:fillRef>
+        <a:effectRef idx="1">
+          <a:schemeClr val="accent1"/>
+        </a:effectRef>
+        <a:fontRef idx="minor">
+          <a:schemeClr val="tx1"/>
+        </a:fontRef>
+      </a:style>
+    </a:lnDef>
+  </a:objectDefaults>
+  <a:extraClrSchemeLst/>
+</a:theme>
 </file>